--- a/assets/slides/lecture-08-slides.pptx
+++ b/assets/slides/lecture-08-slides.pptx
@@ -4623,41 +4623,6 @@
           <a:p>
             <a:pPr algn="ctr"/>
             <a:endParaRPr/>
-          </a:p>
-        </p:txBody>
-      </p:sp>
-      <p:sp>
-        <p:nvSpPr>
-          <p:cNvPr id="11" name="TextBox 10"/>
-          <p:cNvSpPr txBox="1"/>
-          <p:nvPr/>
-        </p:nvSpPr>
-        <p:spPr>
-          <a:xfrm>
-            <a:off x="2871216" y="5230368"/>
-            <a:ext cx="2377440" cy="420624"/>
-          </a:xfrm>
-          <a:prstGeom prst="rect">
-            <a:avLst/>
-          </a:prstGeom>
-          <a:noFill/>
-        </p:spPr>
-        <p:txBody>
-          <a:bodyPr wrap="square" lIns="18288" tIns="18288" rIns="18288" bIns="18288" anchor="ctr">
-            <a:spAutoFit/>
-          </a:bodyPr>
-          <a:lstStyle/>
-          <a:p>
-            <a:pPr algn="ctr"/>
-            <a:r>
-              <a:rPr sz="1150" b="1" i="0">
-                <a:solidFill>
-                  <a:srgbClr val="FFFFFF"/>
-                </a:solidFill>
-                <a:latin typeface="Aptos"/>
-              </a:rPr>
-              <a:t>50-MINUTE SESSION</a:t>
-            </a:r>
           </a:p>
         </p:txBody>
       </p:sp>
